--- a/Wise_Assets_Deck.pptx
+++ b/Wise_Assets_Deck.pptx
@@ -9611,7 +9611,7 @@
                 <a:ea typeface="Arial" pitchFamily="34" charset="-122"/>
                 <a:cs typeface="Arial" pitchFamily="34" charset="-120"/>
               </a:rPr>
-              <a:t>29 DAX measures, a DAX-coloured cohort heatmap and a custom theme</a:t>
+              <a:t>27 DAX measures, a gradient-formatted cohort heatmap and a custom theme</a:t>
             </a:r>
           </a:p>
           <a:p>
